--- a/neerlandais1/powerpoints/Module_8_Formeel_of_informeel.pptx
+++ b/neerlandais1/powerpoints/Module_8_Formeel_of_informeel.pptx
@@ -135,19 +135,19 @@
   <p:extLst>
     <p:ext uri="{521415D9-36F7-43E2-AB2F-B90AF26B5E84}">
       <p14:sectionLst xmlns:p14="http://schemas.microsoft.com/office/powerpoint/2010/main">
-        <p14:section name="Ouverture" id="{208f6cce-5b65-e77d-9b0c-8168949cf398}">
+        <p14:section name="Ouverture" id="{655e8eeb-d57d-4440-2830-dd5d555f6ea9}">
           <p14:sldIdLst>
             <p14:sldId id="256"/>
           </p14:sldIdLst>
         </p14:section>
-        <p14:section name="Découvrir" id="{2e915930-01f7-7da7-a40e-1ec8d4844eaf}">
+        <p14:section name="Découvrir" id="{88467d0b-84cb-3f7b-171b-4e06854094a6}">
           <p14:sldIdLst>
             <p14:sldId id="257"/>
             <p14:sldId id="258"/>
             <p14:sldId id="259"/>
           </p14:sldIdLst>
         </p14:section>
-        <p14:section name="Comprendre" id="{bfd01a00-d78d-7529-8eb6-9437b4b4b389}">
+        <p14:section name="Comprendre" id="{514094a9-fd4a-e403-8904-fb10d3ec1589}">
           <p14:sldIdLst>
             <p14:sldId id="260"/>
             <p14:sldId id="261"/>
@@ -161,7 +161,7 @@
             <p14:sldId id="269"/>
           </p14:sldIdLst>
         </p14:section>
-        <p14:section name="JIJ NU ! — Oefeningen" id="{5ee5a814-8fc2-676b-c6be-47b48a8f0bab}">
+        <p14:section name="JIJ NU ! — Oefeningen" id="{e3449d4a-7c94-a110-777a-f68ea4712b80}">
           <p14:sldIdLst>
             <p14:sldId id="270"/>
             <p14:sldId id="271"/>
@@ -179,7 +179,7 @@
             <p14:sldId id="283"/>
           </p14:sldIdLst>
         </p14:section>
-        <p14:section name="Clôture" id="{33b58513-a091-de7c-94a2-3e6829ac5326}">
+        <p14:section name="Clôture" id="{31eacf81-fe3e-3f4a-4d53-21f4eb99c9ba}">
           <p14:sldIdLst>
             <p14:sldId id="284"/>
           </p14:sldIdLst>
@@ -3988,7 +3988,7 @@
                   <a:srgbClr val="FFFFFF"/>
                 </a:solidFill>
               </a:rPr>
-              <a:t>MODULE 8 / 10</a:t>
+              <a:t>MODULE 8 / 15</a:t>
             </a:r>
             <a:endParaRPr lang="en-US" sz="1400" dirty="0"/>
           </a:p>

--- a/neerlandais1/powerpoints/Module_8_Formeel_of_informeel.pptx
+++ b/neerlandais1/powerpoints/Module_8_Formeel_of_informeel.pptx
@@ -135,19 +135,19 @@
   <p:extLst>
     <p:ext uri="{521415D9-36F7-43E2-AB2F-B90AF26B5E84}">
       <p14:sectionLst xmlns:p14="http://schemas.microsoft.com/office/powerpoint/2010/main">
-        <p14:section name="Ouverture" id="{655e8eeb-d57d-4440-2830-dd5d555f6ea9}">
+        <p14:section name="Ouverture" id="{0ca9a94d-da8f-5331-874d-d33bb2b23881}">
           <p14:sldIdLst>
             <p14:sldId id="256"/>
           </p14:sldIdLst>
         </p14:section>
-        <p14:section name="Découvrir" id="{88467d0b-84cb-3f7b-171b-4e06854094a6}">
+        <p14:section name="Découvrir" id="{472cd424-0743-e027-09ea-b2ed8284866c}">
           <p14:sldIdLst>
             <p14:sldId id="257"/>
             <p14:sldId id="258"/>
             <p14:sldId id="259"/>
           </p14:sldIdLst>
         </p14:section>
-        <p14:section name="Comprendre" id="{514094a9-fd4a-e403-8904-fb10d3ec1589}">
+        <p14:section name="Comprendre" id="{601592c2-2623-a873-4e15-dac54d84d946}">
           <p14:sldIdLst>
             <p14:sldId id="260"/>
             <p14:sldId id="261"/>
@@ -161,7 +161,7 @@
             <p14:sldId id="269"/>
           </p14:sldIdLst>
         </p14:section>
-        <p14:section name="JIJ NU ! — Oefeningen" id="{e3449d4a-7c94-a110-777a-f68ea4712b80}">
+        <p14:section name="JIJ NU ! — Oefeningen" id="{664cd819-1752-f0b6-2567-e5820bd1619b}">
           <p14:sldIdLst>
             <p14:sldId id="270"/>
             <p14:sldId id="271"/>
@@ -179,7 +179,7 @@
             <p14:sldId id="283"/>
           </p14:sldIdLst>
         </p14:section>
-        <p14:section name="Clôture" id="{31eacf81-fe3e-3f4a-4d53-21f4eb99c9ba}">
+        <p14:section name="Clôture" id="{cb0eb5fd-66aa-a5be-4345-4db9a660587b}">
           <p14:sldIdLst>
             <p14:sldId id="284"/>
           </p14:sldIdLst>
@@ -3988,7 +3988,7 @@
                   <a:srgbClr val="FFFFFF"/>
                 </a:solidFill>
               </a:rPr>
-              <a:t>MODULE 8 / 15</a:t>
+              <a:t>MODULE 8 / 19</a:t>
             </a:r>
             <a:endParaRPr lang="en-US" sz="1400" dirty="0"/>
           </a:p>

--- a/neerlandais1/powerpoints/Module_8_Formeel_of_informeel.pptx
+++ b/neerlandais1/powerpoints/Module_8_Formeel_of_informeel.pptx
@@ -135,19 +135,19 @@
   <p:extLst>
     <p:ext uri="{521415D9-36F7-43E2-AB2F-B90AF26B5E84}">
       <p14:sectionLst xmlns:p14="http://schemas.microsoft.com/office/powerpoint/2010/main">
-        <p14:section name="Ouverture" id="{0ca9a94d-da8f-5331-874d-d33bb2b23881}">
+        <p14:section name="Ouverture" id="{25ac6012-d6f3-23e8-5f7c-368cb322f9ad}">
           <p14:sldIdLst>
             <p14:sldId id="256"/>
           </p14:sldIdLst>
         </p14:section>
-        <p14:section name="Découvrir" id="{472cd424-0743-e027-09ea-b2ed8284866c}">
+        <p14:section name="Découvrir" id="{496d2231-eec1-f1e0-f821-88be9704a14b}">
           <p14:sldIdLst>
             <p14:sldId id="257"/>
             <p14:sldId id="258"/>
             <p14:sldId id="259"/>
           </p14:sldIdLst>
         </p14:section>
-        <p14:section name="Comprendre" id="{601592c2-2623-a873-4e15-dac54d84d946}">
+        <p14:section name="Comprendre" id="{7460f59b-e616-481b-4c2f-a24ed095baa2}">
           <p14:sldIdLst>
             <p14:sldId id="260"/>
             <p14:sldId id="261"/>
@@ -161,7 +161,7 @@
             <p14:sldId id="269"/>
           </p14:sldIdLst>
         </p14:section>
-        <p14:section name="JIJ NU ! — Oefeningen" id="{664cd819-1752-f0b6-2567-e5820bd1619b}">
+        <p14:section name="JIJ NU ! — Oefeningen" id="{9b4d646e-3bc6-fbbd-1c9f-0b26cc1a1dd5}">
           <p14:sldIdLst>
             <p14:sldId id="270"/>
             <p14:sldId id="271"/>
@@ -179,7 +179,7 @@
             <p14:sldId id="283"/>
           </p14:sldIdLst>
         </p14:section>
-        <p14:section name="Clôture" id="{cb0eb5fd-66aa-a5be-4345-4db9a660587b}">
+        <p14:section name="Clôture" id="{87c472a2-9c07-00e1-2c17-eb899c93866f}">
           <p14:sldIdLst>
             <p14:sldId id="284"/>
           </p14:sldIdLst>
@@ -3988,7 +3988,7 @@
                   <a:srgbClr val="FFFFFF"/>
                 </a:solidFill>
               </a:rPr>
-              <a:t>MODULE 8 / 19</a:t>
+              <a:t>MODULE 8 / 24</a:t>
             </a:r>
             <a:endParaRPr lang="en-US" sz="1400" dirty="0"/>
           </a:p>

--- a/neerlandais1/powerpoints/Module_8_Formeel_of_informeel.pptx
+++ b/neerlandais1/powerpoints/Module_8_Formeel_of_informeel.pptx
@@ -135,19 +135,19 @@
   <p:extLst>
     <p:ext uri="{521415D9-36F7-43E2-AB2F-B90AF26B5E84}">
       <p14:sectionLst xmlns:p14="http://schemas.microsoft.com/office/powerpoint/2010/main">
-        <p14:section name="Ouverture" id="{25ac6012-d6f3-23e8-5f7c-368cb322f9ad}">
+        <p14:section name="Ouverture" id="{15dea359-72c1-2f57-e7f6-54463bc09770}">
           <p14:sldIdLst>
             <p14:sldId id="256"/>
           </p14:sldIdLst>
         </p14:section>
-        <p14:section name="Découvrir" id="{496d2231-eec1-f1e0-f821-88be9704a14b}">
+        <p14:section name="Découvrir" id="{f3a922da-eee1-4136-e5b3-50284fa024da}">
           <p14:sldIdLst>
             <p14:sldId id="257"/>
             <p14:sldId id="258"/>
             <p14:sldId id="259"/>
           </p14:sldIdLst>
         </p14:section>
-        <p14:section name="Comprendre" id="{7460f59b-e616-481b-4c2f-a24ed095baa2}">
+        <p14:section name="Comprendre" id="{c40360b2-4ee8-b7d7-baab-51d407428cd6}">
           <p14:sldIdLst>
             <p14:sldId id="260"/>
             <p14:sldId id="261"/>
@@ -161,7 +161,7 @@
             <p14:sldId id="269"/>
           </p14:sldIdLst>
         </p14:section>
-        <p14:section name="JIJ NU ! — Oefeningen" id="{9b4d646e-3bc6-fbbd-1c9f-0b26cc1a1dd5}">
+        <p14:section name="JIJ NU ! — Oefeningen" id="{fdee8895-d28d-c30b-03b7-3f720eb422ab}">
           <p14:sldIdLst>
             <p14:sldId id="270"/>
             <p14:sldId id="271"/>
@@ -179,7 +179,7 @@
             <p14:sldId id="283"/>
           </p14:sldIdLst>
         </p14:section>
-        <p14:section name="Clôture" id="{87c472a2-9c07-00e1-2c17-eb899c93866f}">
+        <p14:section name="Clôture" id="{4c14e363-de85-f228-732d-8ce8483222aa}">
           <p14:sldIdLst>
             <p14:sldId id="284"/>
           </p14:sldIdLst>
@@ -678,7 +678,7 @@
             <a:r>
               <a:rPr lang="en-US" dirty="0"/>
               <a:t>Objectif : Formuler une demande avec les verbes de modalité (lien M4).
-graag adoucit willen (« je voudrais bien »). Ik zou graag … willen (conditionnel) est à reconnaître seulement : il est travaillé en Néerlandais 2. alstublieft (poli) / alsjeblieft (familier).</a:t>
+graag adoucit willen (« je voudrais bien »). Ik zou graag … willen (conditionnel) est à reconnaître seulement : il est travaillé au M29. alstublieft (poli) / alsjeblieft (familier).</a:t>
             </a:r>
             <a:endParaRPr lang="en-US" dirty="0"/>
           </a:p>
@@ -3988,7 +3988,7 @@
                   <a:srgbClr val="FFFFFF"/>
                 </a:solidFill>
               </a:rPr>
-              <a:t>MODULE 8 / 24</a:t>
+              <a:t>MODULE 8 / 29</a:t>
             </a:r>
             <a:endParaRPr lang="en-US" sz="1400" dirty="0"/>
           </a:p>

--- a/neerlandais1/powerpoints/Module_8_Formeel_of_informeel.pptx
+++ b/neerlandais1/powerpoints/Module_8_Formeel_of_informeel.pptx
@@ -135,19 +135,19 @@
   <p:extLst>
     <p:ext uri="{521415D9-36F7-43E2-AB2F-B90AF26B5E84}">
       <p14:sectionLst xmlns:p14="http://schemas.microsoft.com/office/powerpoint/2010/main">
-        <p14:section name="Ouverture" id="{15dea359-72c1-2f57-e7f6-54463bc09770}">
+        <p14:section name="Ouverture" id="{1df6c8e5-3e14-e7d5-97f2-fe191bb18553}">
           <p14:sldIdLst>
             <p14:sldId id="256"/>
           </p14:sldIdLst>
         </p14:section>
-        <p14:section name="Découvrir" id="{f3a922da-eee1-4136-e5b3-50284fa024da}">
+        <p14:section name="Découvrir" id="{519250f7-9b8b-cc52-384b-c1055b0ea016}">
           <p14:sldIdLst>
             <p14:sldId id="257"/>
             <p14:sldId id="258"/>
             <p14:sldId id="259"/>
           </p14:sldIdLst>
         </p14:section>
-        <p14:section name="Comprendre" id="{c40360b2-4ee8-b7d7-baab-51d407428cd6}">
+        <p14:section name="Comprendre" id="{eceb42bb-fddd-3fce-3ee2-3577fc7c4187}">
           <p14:sldIdLst>
             <p14:sldId id="260"/>
             <p14:sldId id="261"/>
@@ -161,7 +161,7 @@
             <p14:sldId id="269"/>
           </p14:sldIdLst>
         </p14:section>
-        <p14:section name="JIJ NU ! — Oefeningen" id="{fdee8895-d28d-c30b-03b7-3f720eb422ab}">
+        <p14:section name="JIJ NU ! — Oefeningen" id="{6ef3fce9-e440-60d0-3601-e6a7e28668c3}">
           <p14:sldIdLst>
             <p14:sldId id="270"/>
             <p14:sldId id="271"/>
@@ -179,7 +179,7 @@
             <p14:sldId id="283"/>
           </p14:sldIdLst>
         </p14:section>
-        <p14:section name="Clôture" id="{4c14e363-de85-f228-732d-8ce8483222aa}">
+        <p14:section name="Clôture" id="{dc9bf2a8-fa87-071e-1535-e849909a65cd}">
           <p14:sldIdLst>
             <p14:sldId id="284"/>
           </p14:sldIdLst>
@@ -3988,7 +3988,7 @@
                   <a:srgbClr val="FFFFFF"/>
                 </a:solidFill>
               </a:rPr>
-              <a:t>MODULE 8 / 29</a:t>
+              <a:t>MODULE 8 / 32</a:t>
             </a:r>
             <a:endParaRPr lang="en-US" sz="1400" dirty="0"/>
           </a:p>

--- a/neerlandais1/powerpoints/Module_8_Formeel_of_informeel.pptx
+++ b/neerlandais1/powerpoints/Module_8_Formeel_of_informeel.pptx
@@ -135,19 +135,19 @@
   <p:extLst>
     <p:ext uri="{521415D9-36F7-43E2-AB2F-B90AF26B5E84}">
       <p14:sectionLst xmlns:p14="http://schemas.microsoft.com/office/powerpoint/2010/main">
-        <p14:section name="Ouverture" id="{1df6c8e5-3e14-e7d5-97f2-fe191bb18553}">
+        <p14:section name="Ouverture" id="{f90e4644-b845-8bf5-3d6b-660c7ab2daa7}">
           <p14:sldIdLst>
             <p14:sldId id="256"/>
           </p14:sldIdLst>
         </p14:section>
-        <p14:section name="Découvrir" id="{519250f7-9b8b-cc52-384b-c1055b0ea016}">
+        <p14:section name="Découvrir" id="{9d0b4e76-f206-b805-de20-fbbf4df110df}">
           <p14:sldIdLst>
             <p14:sldId id="257"/>
             <p14:sldId id="258"/>
             <p14:sldId id="259"/>
           </p14:sldIdLst>
         </p14:section>
-        <p14:section name="Comprendre" id="{eceb42bb-fddd-3fce-3ee2-3577fc7c4187}">
+        <p14:section name="Comprendre" id="{73bdb8c1-1474-7667-9dbd-e32a89d17eda}">
           <p14:sldIdLst>
             <p14:sldId id="260"/>
             <p14:sldId id="261"/>
@@ -161,7 +161,7 @@
             <p14:sldId id="269"/>
           </p14:sldIdLst>
         </p14:section>
-        <p14:section name="JIJ NU ! — Oefeningen" id="{6ef3fce9-e440-60d0-3601-e6a7e28668c3}">
+        <p14:section name="JIJ NU ! — Oefeningen" id="{d48326b2-fb3d-97be-3795-683d11aaf658}">
           <p14:sldIdLst>
             <p14:sldId id="270"/>
             <p14:sldId id="271"/>
@@ -179,7 +179,7 @@
             <p14:sldId id="283"/>
           </p14:sldIdLst>
         </p14:section>
-        <p14:section name="Clôture" id="{dc9bf2a8-fa87-071e-1535-e849909a65cd}">
+        <p14:section name="Clôture" id="{f5fbfa05-154c-72fc-2798-6aa844ece04f}">
           <p14:sldIdLst>
             <p14:sldId id="284"/>
           </p14:sldIdLst>

--- a/neerlandais1/powerpoints/Module_8_Formeel_of_informeel.pptx
+++ b/neerlandais1/powerpoints/Module_8_Formeel_of_informeel.pptx
@@ -135,19 +135,19 @@
   <p:extLst>
     <p:ext uri="{521415D9-36F7-43E2-AB2F-B90AF26B5E84}">
       <p14:sectionLst xmlns:p14="http://schemas.microsoft.com/office/powerpoint/2010/main">
-        <p14:section name="Ouverture" id="{f90e4644-b845-8bf5-3d6b-660c7ab2daa7}">
+        <p14:section name="Ouverture" id="{71f7fc2c-ce45-9ce3-6775-6fdb9697f67b}">
           <p14:sldIdLst>
             <p14:sldId id="256"/>
           </p14:sldIdLst>
         </p14:section>
-        <p14:section name="Découvrir" id="{9d0b4e76-f206-b805-de20-fbbf4df110df}">
+        <p14:section name="Découvrir" id="{1ca4946e-5b80-2c15-3168-b7aab5ab79d3}">
           <p14:sldIdLst>
             <p14:sldId id="257"/>
             <p14:sldId id="258"/>
             <p14:sldId id="259"/>
           </p14:sldIdLst>
         </p14:section>
-        <p14:section name="Comprendre" id="{73bdb8c1-1474-7667-9dbd-e32a89d17eda}">
+        <p14:section name="Comprendre" id="{9d58ebba-beb6-e5ca-e3ec-f4236acef68d}">
           <p14:sldIdLst>
             <p14:sldId id="260"/>
             <p14:sldId id="261"/>
@@ -161,7 +161,7 @@
             <p14:sldId id="269"/>
           </p14:sldIdLst>
         </p14:section>
-        <p14:section name="JIJ NU ! — Oefeningen" id="{d48326b2-fb3d-97be-3795-683d11aaf658}">
+        <p14:section name="JIJ NU ! — Oefeningen" id="{4d3f9d57-2a4b-9aa8-3e32-2f34717a097a}">
           <p14:sldIdLst>
             <p14:sldId id="270"/>
             <p14:sldId id="271"/>
@@ -179,7 +179,7 @@
             <p14:sldId id="283"/>
           </p14:sldIdLst>
         </p14:section>
-        <p14:section name="Clôture" id="{f5fbfa05-154c-72fc-2798-6aa844ece04f}">
+        <p14:section name="Clôture" id="{9ec2aeb5-ff65-9d5e-3d99-f2b7c3d263a1}">
           <p14:sldIdLst>
             <p14:sldId id="284"/>
           </p14:sldIdLst>

--- a/neerlandais1/powerpoints/Module_8_Formeel_of_informeel.pptx
+++ b/neerlandais1/powerpoints/Module_8_Formeel_of_informeel.pptx
@@ -135,19 +135,19 @@
   <p:extLst>
     <p:ext uri="{521415D9-36F7-43E2-AB2F-B90AF26B5E84}">
       <p14:sectionLst xmlns:p14="http://schemas.microsoft.com/office/powerpoint/2010/main">
-        <p14:section name="Ouverture" id="{71f7fc2c-ce45-9ce3-6775-6fdb9697f67b}">
+        <p14:section name="Ouverture" id="{368088df-2094-cd16-c49a-64f6501a30f2}">
           <p14:sldIdLst>
             <p14:sldId id="256"/>
           </p14:sldIdLst>
         </p14:section>
-        <p14:section name="Découvrir" id="{1ca4946e-5b80-2c15-3168-b7aab5ab79d3}">
+        <p14:section name="Découvrir" id="{ee7160ec-3ca4-f366-4161-07135b0c6aeb}">
           <p14:sldIdLst>
             <p14:sldId id="257"/>
             <p14:sldId id="258"/>
             <p14:sldId id="259"/>
           </p14:sldIdLst>
         </p14:section>
-        <p14:section name="Comprendre" id="{9d58ebba-beb6-e5ca-e3ec-f4236acef68d}">
+        <p14:section name="Comprendre" id="{0a49d7d3-77a2-dfe5-eb9b-9a53d3744bb6}">
           <p14:sldIdLst>
             <p14:sldId id="260"/>
             <p14:sldId id="261"/>
@@ -161,7 +161,7 @@
             <p14:sldId id="269"/>
           </p14:sldIdLst>
         </p14:section>
-        <p14:section name="JIJ NU ! — Oefeningen" id="{4d3f9d57-2a4b-9aa8-3e32-2f34717a097a}">
+        <p14:section name="JIJ NU ! — Oefeningen" id="{074cbaf6-cb7e-6f00-9c57-4fe3a236d8e1}">
           <p14:sldIdLst>
             <p14:sldId id="270"/>
             <p14:sldId id="271"/>
@@ -179,7 +179,7 @@
             <p14:sldId id="283"/>
           </p14:sldIdLst>
         </p14:section>
-        <p14:section name="Clôture" id="{9ec2aeb5-ff65-9d5e-3d99-f2b7c3d263a1}">
+        <p14:section name="Clôture" id="{7af01130-97ef-83e3-8d3a-60b3a4748462}">
           <p14:sldIdLst>
             <p14:sldId id="284"/>
           </p14:sldIdLst>

--- a/neerlandais1/powerpoints/Module_8_Formeel_of_informeel.pptx
+++ b/neerlandais1/powerpoints/Module_8_Formeel_of_informeel.pptx
@@ -135,19 +135,19 @@
   <p:extLst>
     <p:ext uri="{521415D9-36F7-43E2-AB2F-B90AF26B5E84}">
       <p14:sectionLst xmlns:p14="http://schemas.microsoft.com/office/powerpoint/2010/main">
-        <p14:section name="Ouverture" id="{368088df-2094-cd16-c49a-64f6501a30f2}">
+        <p14:section name="Ouverture" id="{e4988b3c-eddc-a3a7-2eb6-9071b788781c}">
           <p14:sldIdLst>
             <p14:sldId id="256"/>
           </p14:sldIdLst>
         </p14:section>
-        <p14:section name="Découvrir" id="{ee7160ec-3ca4-f366-4161-07135b0c6aeb}">
+        <p14:section name="Découvrir" id="{2e5d5196-d9f0-3c43-b6db-af2833146b9f}">
           <p14:sldIdLst>
             <p14:sldId id="257"/>
             <p14:sldId id="258"/>
             <p14:sldId id="259"/>
           </p14:sldIdLst>
         </p14:section>
-        <p14:section name="Comprendre" id="{0a49d7d3-77a2-dfe5-eb9b-9a53d3744bb6}">
+        <p14:section name="Comprendre" id="{b99ab2cc-fb6e-98ca-027a-3c94fe9a9328}">
           <p14:sldIdLst>
             <p14:sldId id="260"/>
             <p14:sldId id="261"/>
@@ -161,7 +161,7 @@
             <p14:sldId id="269"/>
           </p14:sldIdLst>
         </p14:section>
-        <p14:section name="JIJ NU ! — Oefeningen" id="{074cbaf6-cb7e-6f00-9c57-4fe3a236d8e1}">
+        <p14:section name="JIJ NU ! — Oefeningen" id="{71375c76-7295-e8b0-3321-ef4c7773c9ec}">
           <p14:sldIdLst>
             <p14:sldId id="270"/>
             <p14:sldId id="271"/>
@@ -179,7 +179,7 @@
             <p14:sldId id="283"/>
           </p14:sldIdLst>
         </p14:section>
-        <p14:section name="Clôture" id="{7af01130-97ef-83e3-8d3a-60b3a4748462}">
+        <p14:section name="Clôture" id="{e4cfac9c-3c02-c02c-05ef-e384775810f3}">
           <p14:sldIdLst>
             <p14:sldId id="284"/>
           </p14:sldIdLst>

--- a/neerlandais1/powerpoints/Module_8_Formeel_of_informeel.pptx
+++ b/neerlandais1/powerpoints/Module_8_Formeel_of_informeel.pptx
@@ -135,19 +135,19 @@
   <p:extLst>
     <p:ext uri="{521415D9-36F7-43E2-AB2F-B90AF26B5E84}">
       <p14:sectionLst xmlns:p14="http://schemas.microsoft.com/office/powerpoint/2010/main">
-        <p14:section name="Ouverture" id="{e4988b3c-eddc-a3a7-2eb6-9071b788781c}">
+        <p14:section name="Ouverture" id="{c6e29e56-a6c4-44b7-ec7c-bbec7ef4951c}">
           <p14:sldIdLst>
             <p14:sldId id="256"/>
           </p14:sldIdLst>
         </p14:section>
-        <p14:section name="Découvrir" id="{2e5d5196-d9f0-3c43-b6db-af2833146b9f}">
+        <p14:section name="Découvrir" id="{e73cfaf7-85ee-56e8-ff1c-ec2f3b5eb9d9}">
           <p14:sldIdLst>
             <p14:sldId id="257"/>
             <p14:sldId id="258"/>
             <p14:sldId id="259"/>
           </p14:sldIdLst>
         </p14:section>
-        <p14:section name="Comprendre" id="{b99ab2cc-fb6e-98ca-027a-3c94fe9a9328}">
+        <p14:section name="Comprendre" id="{d593745e-722b-1de0-3408-1da7c0482462}">
           <p14:sldIdLst>
             <p14:sldId id="260"/>
             <p14:sldId id="261"/>
@@ -161,7 +161,7 @@
             <p14:sldId id="269"/>
           </p14:sldIdLst>
         </p14:section>
-        <p14:section name="JIJ NU ! — Oefeningen" id="{71375c76-7295-e8b0-3321-ef4c7773c9ec}">
+        <p14:section name="JIJ NU ! — Oefeningen" id="{dd177fb1-7821-6377-3628-a92a7c226cdb}">
           <p14:sldIdLst>
             <p14:sldId id="270"/>
             <p14:sldId id="271"/>
@@ -179,7 +179,7 @@
             <p14:sldId id="283"/>
           </p14:sldIdLst>
         </p14:section>
-        <p14:section name="Clôture" id="{e4cfac9c-3c02-c02c-05ef-e384775810f3}">
+        <p14:section name="Clôture" id="{14aaa9e5-6ab7-7a49-dc9c-2cff9992998a}">
           <p14:sldIdLst>
             <p14:sldId id="284"/>
           </p14:sldIdLst>

--- a/neerlandais1/powerpoints/Module_8_Formeel_of_informeel.pptx
+++ b/neerlandais1/powerpoints/Module_8_Formeel_of_informeel.pptx
@@ -135,19 +135,19 @@
   <p:extLst>
     <p:ext uri="{521415D9-36F7-43E2-AB2F-B90AF26B5E84}">
       <p14:sectionLst xmlns:p14="http://schemas.microsoft.com/office/powerpoint/2010/main">
-        <p14:section name="Ouverture" id="{c6e29e56-a6c4-44b7-ec7c-bbec7ef4951c}">
+        <p14:section name="Ouverture" id="{e20394cd-cb0a-be3f-7ff3-2f30f9437a50}">
           <p14:sldIdLst>
             <p14:sldId id="256"/>
           </p14:sldIdLst>
         </p14:section>
-        <p14:section name="Découvrir" id="{e73cfaf7-85ee-56e8-ff1c-ec2f3b5eb9d9}">
+        <p14:section name="Découvrir" id="{6c53a1aa-5095-0c96-8c86-3bb8161de29b}">
           <p14:sldIdLst>
             <p14:sldId id="257"/>
             <p14:sldId id="258"/>
             <p14:sldId id="259"/>
           </p14:sldIdLst>
         </p14:section>
-        <p14:section name="Comprendre" id="{d593745e-722b-1de0-3408-1da7c0482462}">
+        <p14:section name="Comprendre" id="{595dc2a8-e3ca-24bd-6808-d357410ea10b}">
           <p14:sldIdLst>
             <p14:sldId id="260"/>
             <p14:sldId id="261"/>
@@ -161,7 +161,7 @@
             <p14:sldId id="269"/>
           </p14:sldIdLst>
         </p14:section>
-        <p14:section name="JIJ NU ! — Oefeningen" id="{dd177fb1-7821-6377-3628-a92a7c226cdb}">
+        <p14:section name="JIJ NU ! — Oefeningen" id="{0a033639-3c4e-df77-ae25-971fe0a67b9b}">
           <p14:sldIdLst>
             <p14:sldId id="270"/>
             <p14:sldId id="271"/>
@@ -179,7 +179,7 @@
             <p14:sldId id="283"/>
           </p14:sldIdLst>
         </p14:section>
-        <p14:section name="Clôture" id="{14aaa9e5-6ab7-7a49-dc9c-2cff9992998a}">
+        <p14:section name="Clôture" id="{2293a0cb-c829-bb81-6239-055dda5f98c8}">
           <p14:sldIdLst>
             <p14:sldId id="284"/>
           </p14:sldIdLst>

--- a/neerlandais1/powerpoints/Module_8_Formeel_of_informeel.pptx
+++ b/neerlandais1/powerpoints/Module_8_Formeel_of_informeel.pptx
@@ -135,19 +135,19 @@
   <p:extLst>
     <p:ext uri="{521415D9-36F7-43E2-AB2F-B90AF26B5E84}">
       <p14:sectionLst xmlns:p14="http://schemas.microsoft.com/office/powerpoint/2010/main">
-        <p14:section name="Ouverture" id="{e20394cd-cb0a-be3f-7ff3-2f30f9437a50}">
+        <p14:section name="Ouverture" id="{ffdc1c10-a0c3-35a6-7bf2-b5551fb4b755}">
           <p14:sldIdLst>
             <p14:sldId id="256"/>
           </p14:sldIdLst>
         </p14:section>
-        <p14:section name="Découvrir" id="{6c53a1aa-5095-0c96-8c86-3bb8161de29b}">
+        <p14:section name="Découvrir" id="{c9e269aa-0ab6-7907-6ad8-26222d36da03}">
           <p14:sldIdLst>
             <p14:sldId id="257"/>
             <p14:sldId id="258"/>
             <p14:sldId id="259"/>
           </p14:sldIdLst>
         </p14:section>
-        <p14:section name="Comprendre" id="{595dc2a8-e3ca-24bd-6808-d357410ea10b}">
+        <p14:section name="Comprendre" id="{b3392c79-82e3-59c2-835d-fd2d4abb19ad}">
           <p14:sldIdLst>
             <p14:sldId id="260"/>
             <p14:sldId id="261"/>
@@ -161,7 +161,7 @@
             <p14:sldId id="269"/>
           </p14:sldIdLst>
         </p14:section>
-        <p14:section name="JIJ NU ! — Oefeningen" id="{0a033639-3c4e-df77-ae25-971fe0a67b9b}">
+        <p14:section name="JIJ NU ! — Oefeningen" id="{2721b29a-f941-4f43-7283-5478f035c28a}">
           <p14:sldIdLst>
             <p14:sldId id="270"/>
             <p14:sldId id="271"/>
@@ -179,7 +179,7 @@
             <p14:sldId id="283"/>
           </p14:sldIdLst>
         </p14:section>
-        <p14:section name="Clôture" id="{2293a0cb-c829-bb81-6239-055dda5f98c8}">
+        <p14:section name="Clôture" id="{f3206d73-77a0-02ef-9d48-9c4053f40d9a}">
           <p14:sldIdLst>
             <p14:sldId id="284"/>
           </p14:sldIdLst>

--- a/neerlandais1/powerpoints/Module_8_Formeel_of_informeel.pptx
+++ b/neerlandais1/powerpoints/Module_8_Formeel_of_informeel.pptx
@@ -135,19 +135,19 @@
   <p:extLst>
     <p:ext uri="{521415D9-36F7-43E2-AB2F-B90AF26B5E84}">
       <p14:sectionLst xmlns:p14="http://schemas.microsoft.com/office/powerpoint/2010/main">
-        <p14:section name="Ouverture" id="{ffdc1c10-a0c3-35a6-7bf2-b5551fb4b755}">
+        <p14:section name="Ouverture" id="{87147af6-4767-ac2a-a6be-cec3a94d0f05}">
           <p14:sldIdLst>
             <p14:sldId id="256"/>
           </p14:sldIdLst>
         </p14:section>
-        <p14:section name="Découvrir" id="{c9e269aa-0ab6-7907-6ad8-26222d36da03}">
+        <p14:section name="Découvrir" id="{31b9d8b3-b685-5e37-8fba-0adc6052432a}">
           <p14:sldIdLst>
             <p14:sldId id="257"/>
             <p14:sldId id="258"/>
             <p14:sldId id="259"/>
           </p14:sldIdLst>
         </p14:section>
-        <p14:section name="Comprendre" id="{b3392c79-82e3-59c2-835d-fd2d4abb19ad}">
+        <p14:section name="Comprendre" id="{b42deabf-da86-a025-742c-d5bf104fcfd6}">
           <p14:sldIdLst>
             <p14:sldId id="260"/>
             <p14:sldId id="261"/>
@@ -161,7 +161,7 @@
             <p14:sldId id="269"/>
           </p14:sldIdLst>
         </p14:section>
-        <p14:section name="JIJ NU ! — Oefeningen" id="{2721b29a-f941-4f43-7283-5478f035c28a}">
+        <p14:section name="JIJ NU ! — Oefeningen" id="{74f5c7a9-0675-ebc9-1a1a-c00e2614a9b4}">
           <p14:sldIdLst>
             <p14:sldId id="270"/>
             <p14:sldId id="271"/>
@@ -179,7 +179,7 @@
             <p14:sldId id="283"/>
           </p14:sldIdLst>
         </p14:section>
-        <p14:section name="Clôture" id="{f3206d73-77a0-02ef-9d48-9c4053f40d9a}">
+        <p14:section name="Clôture" id="{69191dba-bbb6-4871-9531-40aed29f4218}">
           <p14:sldIdLst>
             <p14:sldId id="284"/>
           </p14:sldIdLst>
